--- a/public/videos/repositories/exam-date-alert/exam-date-alert-tech-preview.pptx
+++ b/public/videos/repositories/exam-date-alert/exam-date-alert-tech-preview.pptx
@@ -134,7 +134,7 @@
           <p:cNvPr id="2" name="タイトル 1">
             <a:extLst>
               <a:ext uri="{FF2B5EF4-FFF2-40B4-BE49-F238E27FC236}">
-                <a16:creationId xmlns:a16="http://schemas.microsoft.com/office/drawing/2014/main" id="{AEFD0F1C-229B-28B4-232C-5C742325AE6C}"/>
+                <a16:creationId xmlns:a16="http://schemas.microsoft.com/office/drawing/2014/main" id="{EC02B7A6-7EB0-E4EC-7C23-44139F54C2EF}"/>
               </a:ext>
             </a:extLst>
           </p:cNvPr>
@@ -171,7 +171,7 @@
           <p:cNvPr id="3" name="字幕 2">
             <a:extLst>
               <a:ext uri="{FF2B5EF4-FFF2-40B4-BE49-F238E27FC236}">
-                <a16:creationId xmlns:a16="http://schemas.microsoft.com/office/drawing/2014/main" id="{0D37CFC6-1DA6-2EEA-BE97-F837E68D8A82}"/>
+                <a16:creationId xmlns:a16="http://schemas.microsoft.com/office/drawing/2014/main" id="{D1C46B39-F0AE-9869-9D8F-CB8C52503A7C}"/>
               </a:ext>
             </a:extLst>
           </p:cNvPr>
@@ -241,7 +241,7 @@
           <p:cNvPr id="4" name="日付プレースホルダー 3">
             <a:extLst>
               <a:ext uri="{FF2B5EF4-FFF2-40B4-BE49-F238E27FC236}">
-                <a16:creationId xmlns:a16="http://schemas.microsoft.com/office/drawing/2014/main" id="{C9B7B93A-E8F5-7AED-112C-C4BFD4B9301C}"/>
+                <a16:creationId xmlns:a16="http://schemas.microsoft.com/office/drawing/2014/main" id="{2C3EA0AA-660C-EAD9-3430-A8579181C9B2}"/>
               </a:ext>
             </a:extLst>
           </p:cNvPr>
@@ -257,7 +257,7 @@
           <a:bodyPr/>
           <a:lstStyle/>
           <a:p>
-            <a:fld id="{8439367F-274D-4BBC-90C2-F0C64D0ACC24}" type="datetimeFigureOut">
+            <a:fld id="{726F9719-F195-4A7D-880E-523B62E86B40}" type="datetimeFigureOut">
               <a:rPr kumimoji="1" lang="ja-JP" altLang="en-US" smtClean="0"/>
               <a:t>2026/7/30</a:t>
             </a:fld>
@@ -270,7 +270,7 @@
           <p:cNvPr id="5" name="フッター プレースホルダー 4">
             <a:extLst>
               <a:ext uri="{FF2B5EF4-FFF2-40B4-BE49-F238E27FC236}">
-                <a16:creationId xmlns:a16="http://schemas.microsoft.com/office/drawing/2014/main" id="{F30E95A1-A906-58D1-6042-CE86B01BDC49}"/>
+                <a16:creationId xmlns:a16="http://schemas.microsoft.com/office/drawing/2014/main" id="{1C81B1A7-DE05-6FA4-ADA5-63700CCBC455}"/>
               </a:ext>
             </a:extLst>
           </p:cNvPr>
@@ -295,7 +295,7 @@
           <p:cNvPr id="6" name="スライド番号プレースホルダー 5">
             <a:extLst>
               <a:ext uri="{FF2B5EF4-FFF2-40B4-BE49-F238E27FC236}">
-                <a16:creationId xmlns:a16="http://schemas.microsoft.com/office/drawing/2014/main" id="{BCA640D0-01DF-7189-A8AA-6C3317F2BF4E}"/>
+                <a16:creationId xmlns:a16="http://schemas.microsoft.com/office/drawing/2014/main" id="{E472059A-8375-A5A7-A22A-D82BBC6E6991}"/>
               </a:ext>
             </a:extLst>
           </p:cNvPr>
@@ -311,7 +311,7 @@
           <a:bodyPr/>
           <a:lstStyle/>
           <a:p>
-            <a:fld id="{59B490DF-494B-4AAE-BE1F-A36078D12FDA}" type="slidenum">
+            <a:fld id="{3FA5B6A3-4019-4767-B5D3-AAED3E725C3A}" type="slidenum">
               <a:rPr kumimoji="1" lang="ja-JP" altLang="en-US" smtClean="0"/>
               <a:t>‹#›</a:t>
             </a:fld>
@@ -322,7 +322,7 @@
     </p:spTree>
     <p:extLst>
       <p:ext uri="{BB962C8B-B14F-4D97-AF65-F5344CB8AC3E}">
-        <p14:creationId xmlns:p14="http://schemas.microsoft.com/office/powerpoint/2010/main" val="2877906086"/>
+        <p14:creationId xmlns:p14="http://schemas.microsoft.com/office/powerpoint/2010/main" val="1884884464"/>
       </p:ext>
     </p:extLst>
   </p:cSld>
@@ -354,7 +354,7 @@
           <p:cNvPr id="2" name="タイトル 1">
             <a:extLst>
               <a:ext uri="{FF2B5EF4-FFF2-40B4-BE49-F238E27FC236}">
-                <a16:creationId xmlns:a16="http://schemas.microsoft.com/office/drawing/2014/main" id="{3000767C-24C1-BBF0-3DB3-7332A662A6D0}"/>
+                <a16:creationId xmlns:a16="http://schemas.microsoft.com/office/drawing/2014/main" id="{83E481BE-8866-16BC-03CC-A6445A5033EA}"/>
               </a:ext>
             </a:extLst>
           </p:cNvPr>
@@ -382,7 +382,7 @@
           <p:cNvPr id="3" name="縦書きテキスト プレースホルダー 2">
             <a:extLst>
               <a:ext uri="{FF2B5EF4-FFF2-40B4-BE49-F238E27FC236}">
-                <a16:creationId xmlns:a16="http://schemas.microsoft.com/office/drawing/2014/main" id="{C4EABE9F-EB3F-41F1-DCB6-352220899492}"/>
+                <a16:creationId xmlns:a16="http://schemas.microsoft.com/office/drawing/2014/main" id="{7A514D29-E687-2922-D203-9B8169256A3C}"/>
               </a:ext>
             </a:extLst>
           </p:cNvPr>
@@ -471,7 +471,7 @@
           <p:cNvPr id="4" name="日付プレースホルダー 3">
             <a:extLst>
               <a:ext uri="{FF2B5EF4-FFF2-40B4-BE49-F238E27FC236}">
-                <a16:creationId xmlns:a16="http://schemas.microsoft.com/office/drawing/2014/main" id="{E0EBC9E3-B4FE-6910-D8FD-365FC44A0B9C}"/>
+                <a16:creationId xmlns:a16="http://schemas.microsoft.com/office/drawing/2014/main" id="{653A3E22-EF7D-C687-7C65-BBFD33FA4A85}"/>
               </a:ext>
             </a:extLst>
           </p:cNvPr>
@@ -487,7 +487,7 @@
           <a:bodyPr/>
           <a:lstStyle/>
           <a:p>
-            <a:fld id="{8439367F-274D-4BBC-90C2-F0C64D0ACC24}" type="datetimeFigureOut">
+            <a:fld id="{726F9719-F195-4A7D-880E-523B62E86B40}" type="datetimeFigureOut">
               <a:rPr kumimoji="1" lang="ja-JP" altLang="en-US" smtClean="0"/>
               <a:t>2026/7/30</a:t>
             </a:fld>
@@ -500,7 +500,7 @@
           <p:cNvPr id="5" name="フッター プレースホルダー 4">
             <a:extLst>
               <a:ext uri="{FF2B5EF4-FFF2-40B4-BE49-F238E27FC236}">
-                <a16:creationId xmlns:a16="http://schemas.microsoft.com/office/drawing/2014/main" id="{9B7C1190-9EDB-5EFB-79D3-676D7555FD36}"/>
+                <a16:creationId xmlns:a16="http://schemas.microsoft.com/office/drawing/2014/main" id="{8B53CFF0-2ABD-E8CB-3396-4C5452D7EEE2}"/>
               </a:ext>
             </a:extLst>
           </p:cNvPr>
@@ -525,7 +525,7 @@
           <p:cNvPr id="6" name="スライド番号プレースホルダー 5">
             <a:extLst>
               <a:ext uri="{FF2B5EF4-FFF2-40B4-BE49-F238E27FC236}">
-                <a16:creationId xmlns:a16="http://schemas.microsoft.com/office/drawing/2014/main" id="{004CCACD-DD5E-1ABF-3B24-BAC5E55A374D}"/>
+                <a16:creationId xmlns:a16="http://schemas.microsoft.com/office/drawing/2014/main" id="{665252F8-570E-25C7-97C2-32344D2A9854}"/>
               </a:ext>
             </a:extLst>
           </p:cNvPr>
@@ -541,7 +541,7 @@
           <a:bodyPr/>
           <a:lstStyle/>
           <a:p>
-            <a:fld id="{59B490DF-494B-4AAE-BE1F-A36078D12FDA}" type="slidenum">
+            <a:fld id="{3FA5B6A3-4019-4767-B5D3-AAED3E725C3A}" type="slidenum">
               <a:rPr kumimoji="1" lang="ja-JP" altLang="en-US" smtClean="0"/>
               <a:t>‹#›</a:t>
             </a:fld>
@@ -552,7 +552,7 @@
     </p:spTree>
     <p:extLst>
       <p:ext uri="{BB962C8B-B14F-4D97-AF65-F5344CB8AC3E}">
-        <p14:creationId xmlns:p14="http://schemas.microsoft.com/office/powerpoint/2010/main" val="3860489902"/>
+        <p14:creationId xmlns:p14="http://schemas.microsoft.com/office/powerpoint/2010/main" val="4177104761"/>
       </p:ext>
     </p:extLst>
   </p:cSld>
@@ -584,7 +584,7 @@
           <p:cNvPr id="2" name="縦書きタイトル 1">
             <a:extLst>
               <a:ext uri="{FF2B5EF4-FFF2-40B4-BE49-F238E27FC236}">
-                <a16:creationId xmlns:a16="http://schemas.microsoft.com/office/drawing/2014/main" id="{A4F44CAC-2580-D637-0F8F-5C7C22E0B944}"/>
+                <a16:creationId xmlns:a16="http://schemas.microsoft.com/office/drawing/2014/main" id="{581844FF-2639-EA88-17F8-8D1A92F3C1F0}"/>
               </a:ext>
             </a:extLst>
           </p:cNvPr>
@@ -617,7 +617,7 @@
           <p:cNvPr id="3" name="縦書きテキスト プレースホルダー 2">
             <a:extLst>
               <a:ext uri="{FF2B5EF4-FFF2-40B4-BE49-F238E27FC236}">
-                <a16:creationId xmlns:a16="http://schemas.microsoft.com/office/drawing/2014/main" id="{4E9FDB26-C802-69C7-F01A-5B2984A1C71B}"/>
+                <a16:creationId xmlns:a16="http://schemas.microsoft.com/office/drawing/2014/main" id="{54635DD8-0C52-CA63-0719-14D6502C1411}"/>
               </a:ext>
             </a:extLst>
           </p:cNvPr>
@@ -711,7 +711,7 @@
           <p:cNvPr id="4" name="日付プレースホルダー 3">
             <a:extLst>
               <a:ext uri="{FF2B5EF4-FFF2-40B4-BE49-F238E27FC236}">
-                <a16:creationId xmlns:a16="http://schemas.microsoft.com/office/drawing/2014/main" id="{95065CA3-CDC9-38CB-02B2-1A9EB468F258}"/>
+                <a16:creationId xmlns:a16="http://schemas.microsoft.com/office/drawing/2014/main" id="{9A872074-C022-97D8-9F6F-43030D66B27C}"/>
               </a:ext>
             </a:extLst>
           </p:cNvPr>
@@ -727,7 +727,7 @@
           <a:bodyPr/>
           <a:lstStyle/>
           <a:p>
-            <a:fld id="{8439367F-274D-4BBC-90C2-F0C64D0ACC24}" type="datetimeFigureOut">
+            <a:fld id="{726F9719-F195-4A7D-880E-523B62E86B40}" type="datetimeFigureOut">
               <a:rPr kumimoji="1" lang="ja-JP" altLang="en-US" smtClean="0"/>
               <a:t>2026/7/30</a:t>
             </a:fld>
@@ -740,7 +740,7 @@
           <p:cNvPr id="5" name="フッター プレースホルダー 4">
             <a:extLst>
               <a:ext uri="{FF2B5EF4-FFF2-40B4-BE49-F238E27FC236}">
-                <a16:creationId xmlns:a16="http://schemas.microsoft.com/office/drawing/2014/main" id="{17DFC448-E577-6F9B-B21B-8A6373C3FA6C}"/>
+                <a16:creationId xmlns:a16="http://schemas.microsoft.com/office/drawing/2014/main" id="{3868424D-2BF9-9072-1AE1-0D7CCF30859C}"/>
               </a:ext>
             </a:extLst>
           </p:cNvPr>
@@ -765,7 +765,7 @@
           <p:cNvPr id="6" name="スライド番号プレースホルダー 5">
             <a:extLst>
               <a:ext uri="{FF2B5EF4-FFF2-40B4-BE49-F238E27FC236}">
-                <a16:creationId xmlns:a16="http://schemas.microsoft.com/office/drawing/2014/main" id="{5A847875-75BC-CD8F-90FD-6611D4D989EC}"/>
+                <a16:creationId xmlns:a16="http://schemas.microsoft.com/office/drawing/2014/main" id="{D105643A-4C25-4437-B4CB-04FA210A98D1}"/>
               </a:ext>
             </a:extLst>
           </p:cNvPr>
@@ -781,7 +781,7 @@
           <a:bodyPr/>
           <a:lstStyle/>
           <a:p>
-            <a:fld id="{59B490DF-494B-4AAE-BE1F-A36078D12FDA}" type="slidenum">
+            <a:fld id="{3FA5B6A3-4019-4767-B5D3-AAED3E725C3A}" type="slidenum">
               <a:rPr kumimoji="1" lang="ja-JP" altLang="en-US" smtClean="0"/>
               <a:t>‹#›</a:t>
             </a:fld>
@@ -792,7 +792,7 @@
     </p:spTree>
     <p:extLst>
       <p:ext uri="{BB962C8B-B14F-4D97-AF65-F5344CB8AC3E}">
-        <p14:creationId xmlns:p14="http://schemas.microsoft.com/office/powerpoint/2010/main" val="4234111277"/>
+        <p14:creationId xmlns:p14="http://schemas.microsoft.com/office/powerpoint/2010/main" val="1687476831"/>
       </p:ext>
     </p:extLst>
   </p:cSld>
@@ -824,7 +824,7 @@
           <p:cNvPr id="2" name="タイトル 1">
             <a:extLst>
               <a:ext uri="{FF2B5EF4-FFF2-40B4-BE49-F238E27FC236}">
-                <a16:creationId xmlns:a16="http://schemas.microsoft.com/office/drawing/2014/main" id="{E5815565-594D-AB84-CE6A-DB05B8D2F32B}"/>
+                <a16:creationId xmlns:a16="http://schemas.microsoft.com/office/drawing/2014/main" id="{4B101823-341B-9181-AF0E-F51606CC59AB}"/>
               </a:ext>
             </a:extLst>
           </p:cNvPr>
@@ -852,7 +852,7 @@
           <p:cNvPr id="3" name="コンテンツ プレースホルダー 2">
             <a:extLst>
               <a:ext uri="{FF2B5EF4-FFF2-40B4-BE49-F238E27FC236}">
-                <a16:creationId xmlns:a16="http://schemas.microsoft.com/office/drawing/2014/main" id="{F0AD789A-81BC-2E63-5F1D-3AEF417DB195}"/>
+                <a16:creationId xmlns:a16="http://schemas.microsoft.com/office/drawing/2014/main" id="{0BA1BB0C-C9D1-71A7-BAB5-BAF0166FBE4F}"/>
               </a:ext>
             </a:extLst>
           </p:cNvPr>
@@ -941,7 +941,7 @@
           <p:cNvPr id="4" name="日付プレースホルダー 3">
             <a:extLst>
               <a:ext uri="{FF2B5EF4-FFF2-40B4-BE49-F238E27FC236}">
-                <a16:creationId xmlns:a16="http://schemas.microsoft.com/office/drawing/2014/main" id="{3BA62B25-C1A1-FA0C-651A-76483E33446A}"/>
+                <a16:creationId xmlns:a16="http://schemas.microsoft.com/office/drawing/2014/main" id="{D086876E-5E3B-D061-A55F-0D8D4C2B5FAE}"/>
               </a:ext>
             </a:extLst>
           </p:cNvPr>
@@ -957,7 +957,7 @@
           <a:bodyPr/>
           <a:lstStyle/>
           <a:p>
-            <a:fld id="{8439367F-274D-4BBC-90C2-F0C64D0ACC24}" type="datetimeFigureOut">
+            <a:fld id="{726F9719-F195-4A7D-880E-523B62E86B40}" type="datetimeFigureOut">
               <a:rPr kumimoji="1" lang="ja-JP" altLang="en-US" smtClean="0"/>
               <a:t>2026/7/30</a:t>
             </a:fld>
@@ -970,7 +970,7 @@
           <p:cNvPr id="5" name="フッター プレースホルダー 4">
             <a:extLst>
               <a:ext uri="{FF2B5EF4-FFF2-40B4-BE49-F238E27FC236}">
-                <a16:creationId xmlns:a16="http://schemas.microsoft.com/office/drawing/2014/main" id="{98ABDB10-D027-1FC6-25EA-6B7991126BE2}"/>
+                <a16:creationId xmlns:a16="http://schemas.microsoft.com/office/drawing/2014/main" id="{4E8553FD-BE32-5D38-1C27-7B5D89A3E33B}"/>
               </a:ext>
             </a:extLst>
           </p:cNvPr>
@@ -995,7 +995,7 @@
           <p:cNvPr id="6" name="スライド番号プレースホルダー 5">
             <a:extLst>
               <a:ext uri="{FF2B5EF4-FFF2-40B4-BE49-F238E27FC236}">
-                <a16:creationId xmlns:a16="http://schemas.microsoft.com/office/drawing/2014/main" id="{2724138C-5F40-A130-8BC8-DB10D8CE80CB}"/>
+                <a16:creationId xmlns:a16="http://schemas.microsoft.com/office/drawing/2014/main" id="{98DCE35E-65FB-9359-6663-C4E35FE37868}"/>
               </a:ext>
             </a:extLst>
           </p:cNvPr>
@@ -1011,7 +1011,7 @@
           <a:bodyPr/>
           <a:lstStyle/>
           <a:p>
-            <a:fld id="{59B490DF-494B-4AAE-BE1F-A36078D12FDA}" type="slidenum">
+            <a:fld id="{3FA5B6A3-4019-4767-B5D3-AAED3E725C3A}" type="slidenum">
               <a:rPr kumimoji="1" lang="ja-JP" altLang="en-US" smtClean="0"/>
               <a:t>‹#›</a:t>
             </a:fld>
@@ -1022,7 +1022,7 @@
     </p:spTree>
     <p:extLst>
       <p:ext uri="{BB962C8B-B14F-4D97-AF65-F5344CB8AC3E}">
-        <p14:creationId xmlns:p14="http://schemas.microsoft.com/office/powerpoint/2010/main" val="2917466125"/>
+        <p14:creationId xmlns:p14="http://schemas.microsoft.com/office/powerpoint/2010/main" val="2549056499"/>
       </p:ext>
     </p:extLst>
   </p:cSld>
@@ -1054,7 +1054,7 @@
           <p:cNvPr id="2" name="タイトル 1">
             <a:extLst>
               <a:ext uri="{FF2B5EF4-FFF2-40B4-BE49-F238E27FC236}">
-                <a16:creationId xmlns:a16="http://schemas.microsoft.com/office/drawing/2014/main" id="{C7C3DAC7-0F46-CDAB-305B-78851E0AE929}"/>
+                <a16:creationId xmlns:a16="http://schemas.microsoft.com/office/drawing/2014/main" id="{59FA46F9-1376-2D0E-B2F0-629A32DE603C}"/>
               </a:ext>
             </a:extLst>
           </p:cNvPr>
@@ -1091,7 +1091,7 @@
           <p:cNvPr id="3" name="テキスト プレースホルダー 2">
             <a:extLst>
               <a:ext uri="{FF2B5EF4-FFF2-40B4-BE49-F238E27FC236}">
-                <a16:creationId xmlns:a16="http://schemas.microsoft.com/office/drawing/2014/main" id="{183C0351-C4BD-F6B2-9CE8-E4AF61663590}"/>
+                <a16:creationId xmlns:a16="http://schemas.microsoft.com/office/drawing/2014/main" id="{82DEFA4B-DDFE-FB04-DB5A-F44900AD438E}"/>
               </a:ext>
             </a:extLst>
           </p:cNvPr>
@@ -1216,7 +1216,7 @@
           <p:cNvPr id="4" name="日付プレースホルダー 3">
             <a:extLst>
               <a:ext uri="{FF2B5EF4-FFF2-40B4-BE49-F238E27FC236}">
-                <a16:creationId xmlns:a16="http://schemas.microsoft.com/office/drawing/2014/main" id="{631711B5-EF2A-3E10-59A3-72DDB9045335}"/>
+                <a16:creationId xmlns:a16="http://schemas.microsoft.com/office/drawing/2014/main" id="{966BEF34-B2A7-57F7-C797-274CFA9BFDBE}"/>
               </a:ext>
             </a:extLst>
           </p:cNvPr>
@@ -1232,7 +1232,7 @@
           <a:bodyPr/>
           <a:lstStyle/>
           <a:p>
-            <a:fld id="{8439367F-274D-4BBC-90C2-F0C64D0ACC24}" type="datetimeFigureOut">
+            <a:fld id="{726F9719-F195-4A7D-880E-523B62E86B40}" type="datetimeFigureOut">
               <a:rPr kumimoji="1" lang="ja-JP" altLang="en-US" smtClean="0"/>
               <a:t>2026/7/30</a:t>
             </a:fld>
@@ -1245,7 +1245,7 @@
           <p:cNvPr id="5" name="フッター プレースホルダー 4">
             <a:extLst>
               <a:ext uri="{FF2B5EF4-FFF2-40B4-BE49-F238E27FC236}">
-                <a16:creationId xmlns:a16="http://schemas.microsoft.com/office/drawing/2014/main" id="{541C2EA3-C8CA-854B-4C89-362ABA8B2E4F}"/>
+                <a16:creationId xmlns:a16="http://schemas.microsoft.com/office/drawing/2014/main" id="{611E1C83-92AD-EB24-C01C-C69CEF95973C}"/>
               </a:ext>
             </a:extLst>
           </p:cNvPr>
@@ -1270,7 +1270,7 @@
           <p:cNvPr id="6" name="スライド番号プレースホルダー 5">
             <a:extLst>
               <a:ext uri="{FF2B5EF4-FFF2-40B4-BE49-F238E27FC236}">
-                <a16:creationId xmlns:a16="http://schemas.microsoft.com/office/drawing/2014/main" id="{A6EE9967-3BB7-315B-E67F-01323916DBD7}"/>
+                <a16:creationId xmlns:a16="http://schemas.microsoft.com/office/drawing/2014/main" id="{40846DD4-16AF-01AE-7095-74ED5BC4FF33}"/>
               </a:ext>
             </a:extLst>
           </p:cNvPr>
@@ -1286,7 +1286,7 @@
           <a:bodyPr/>
           <a:lstStyle/>
           <a:p>
-            <a:fld id="{59B490DF-494B-4AAE-BE1F-A36078D12FDA}" type="slidenum">
+            <a:fld id="{3FA5B6A3-4019-4767-B5D3-AAED3E725C3A}" type="slidenum">
               <a:rPr kumimoji="1" lang="ja-JP" altLang="en-US" smtClean="0"/>
               <a:t>‹#›</a:t>
             </a:fld>
@@ -1297,7 +1297,7 @@
     </p:spTree>
     <p:extLst>
       <p:ext uri="{BB962C8B-B14F-4D97-AF65-F5344CB8AC3E}">
-        <p14:creationId xmlns:p14="http://schemas.microsoft.com/office/powerpoint/2010/main" val="465839918"/>
+        <p14:creationId xmlns:p14="http://schemas.microsoft.com/office/powerpoint/2010/main" val="3804786964"/>
       </p:ext>
     </p:extLst>
   </p:cSld>
@@ -1329,7 +1329,7 @@
           <p:cNvPr id="2" name="タイトル 1">
             <a:extLst>
               <a:ext uri="{FF2B5EF4-FFF2-40B4-BE49-F238E27FC236}">
-                <a16:creationId xmlns:a16="http://schemas.microsoft.com/office/drawing/2014/main" id="{7C7C6E85-CD6A-0A1F-DDCC-9F7B487ED44C}"/>
+                <a16:creationId xmlns:a16="http://schemas.microsoft.com/office/drawing/2014/main" id="{F1533D13-F07A-4332-BED4-FE0298E1BA88}"/>
               </a:ext>
             </a:extLst>
           </p:cNvPr>
@@ -1357,7 +1357,7 @@
           <p:cNvPr id="3" name="コンテンツ プレースホルダー 2">
             <a:extLst>
               <a:ext uri="{FF2B5EF4-FFF2-40B4-BE49-F238E27FC236}">
-                <a16:creationId xmlns:a16="http://schemas.microsoft.com/office/drawing/2014/main" id="{6E5B30AB-6526-3714-14A0-24F54BE372B1}"/>
+                <a16:creationId xmlns:a16="http://schemas.microsoft.com/office/drawing/2014/main" id="{0A5629D3-2AD5-CFCF-0B42-CBB01122D1BA}"/>
               </a:ext>
             </a:extLst>
           </p:cNvPr>
@@ -1451,7 +1451,7 @@
           <p:cNvPr id="4" name="コンテンツ プレースホルダー 3">
             <a:extLst>
               <a:ext uri="{FF2B5EF4-FFF2-40B4-BE49-F238E27FC236}">
-                <a16:creationId xmlns:a16="http://schemas.microsoft.com/office/drawing/2014/main" id="{21C39B33-6FFA-6757-A170-C71653C2CD9A}"/>
+                <a16:creationId xmlns:a16="http://schemas.microsoft.com/office/drawing/2014/main" id="{62836603-FE53-0A9E-B22B-B96D8F921E89}"/>
               </a:ext>
             </a:extLst>
           </p:cNvPr>
@@ -1545,7 +1545,7 @@
           <p:cNvPr id="5" name="日付プレースホルダー 4">
             <a:extLst>
               <a:ext uri="{FF2B5EF4-FFF2-40B4-BE49-F238E27FC236}">
-                <a16:creationId xmlns:a16="http://schemas.microsoft.com/office/drawing/2014/main" id="{5DED4611-4C68-ACD8-0BBC-222FDB4629D0}"/>
+                <a16:creationId xmlns:a16="http://schemas.microsoft.com/office/drawing/2014/main" id="{3719802B-6C3E-16AD-12D5-EC29F7A6CB65}"/>
               </a:ext>
             </a:extLst>
           </p:cNvPr>
@@ -1561,7 +1561,7 @@
           <a:bodyPr/>
           <a:lstStyle/>
           <a:p>
-            <a:fld id="{8439367F-274D-4BBC-90C2-F0C64D0ACC24}" type="datetimeFigureOut">
+            <a:fld id="{726F9719-F195-4A7D-880E-523B62E86B40}" type="datetimeFigureOut">
               <a:rPr kumimoji="1" lang="ja-JP" altLang="en-US" smtClean="0"/>
               <a:t>2026/7/30</a:t>
             </a:fld>
@@ -1574,7 +1574,7 @@
           <p:cNvPr id="6" name="フッター プレースホルダー 5">
             <a:extLst>
               <a:ext uri="{FF2B5EF4-FFF2-40B4-BE49-F238E27FC236}">
-                <a16:creationId xmlns:a16="http://schemas.microsoft.com/office/drawing/2014/main" id="{66A67FF5-24A1-55B4-643B-6A32F8FAC87F}"/>
+                <a16:creationId xmlns:a16="http://schemas.microsoft.com/office/drawing/2014/main" id="{11C462CA-4F6D-1D28-6C67-FEBDF8F558DE}"/>
               </a:ext>
             </a:extLst>
           </p:cNvPr>
@@ -1599,7 +1599,7 @@
           <p:cNvPr id="7" name="スライド番号プレースホルダー 6">
             <a:extLst>
               <a:ext uri="{FF2B5EF4-FFF2-40B4-BE49-F238E27FC236}">
-                <a16:creationId xmlns:a16="http://schemas.microsoft.com/office/drawing/2014/main" id="{FCFD0D8E-A10F-5065-8685-0045612F35EA}"/>
+                <a16:creationId xmlns:a16="http://schemas.microsoft.com/office/drawing/2014/main" id="{601E86AE-9738-E375-8F71-6DABE2645957}"/>
               </a:ext>
             </a:extLst>
           </p:cNvPr>
@@ -1615,7 +1615,7 @@
           <a:bodyPr/>
           <a:lstStyle/>
           <a:p>
-            <a:fld id="{59B490DF-494B-4AAE-BE1F-A36078D12FDA}" type="slidenum">
+            <a:fld id="{3FA5B6A3-4019-4767-B5D3-AAED3E725C3A}" type="slidenum">
               <a:rPr kumimoji="1" lang="ja-JP" altLang="en-US" smtClean="0"/>
               <a:t>‹#›</a:t>
             </a:fld>
@@ -1626,7 +1626,7 @@
     </p:spTree>
     <p:extLst>
       <p:ext uri="{BB962C8B-B14F-4D97-AF65-F5344CB8AC3E}">
-        <p14:creationId xmlns:p14="http://schemas.microsoft.com/office/powerpoint/2010/main" val="1011096252"/>
+        <p14:creationId xmlns:p14="http://schemas.microsoft.com/office/powerpoint/2010/main" val="3613477263"/>
       </p:ext>
     </p:extLst>
   </p:cSld>
@@ -1658,7 +1658,7 @@
           <p:cNvPr id="2" name="タイトル 1">
             <a:extLst>
               <a:ext uri="{FF2B5EF4-FFF2-40B4-BE49-F238E27FC236}">
-                <a16:creationId xmlns:a16="http://schemas.microsoft.com/office/drawing/2014/main" id="{6BFCDE6D-9C3E-D392-1FE7-C3323CBD3A18}"/>
+                <a16:creationId xmlns:a16="http://schemas.microsoft.com/office/drawing/2014/main" id="{64F1AFE7-538B-DAC0-2AEC-24DA344378C0}"/>
               </a:ext>
             </a:extLst>
           </p:cNvPr>
@@ -1691,7 +1691,7 @@
           <p:cNvPr id="3" name="テキスト プレースホルダー 2">
             <a:extLst>
               <a:ext uri="{FF2B5EF4-FFF2-40B4-BE49-F238E27FC236}">
-                <a16:creationId xmlns:a16="http://schemas.microsoft.com/office/drawing/2014/main" id="{1FB69EF9-B17D-C2ED-4B89-20F60BAF0687}"/>
+                <a16:creationId xmlns:a16="http://schemas.microsoft.com/office/drawing/2014/main" id="{FF633129-D010-5DA6-994B-8C08BDC50942}"/>
               </a:ext>
             </a:extLst>
           </p:cNvPr>
@@ -1762,7 +1762,7 @@
           <p:cNvPr id="4" name="コンテンツ プレースホルダー 3">
             <a:extLst>
               <a:ext uri="{FF2B5EF4-FFF2-40B4-BE49-F238E27FC236}">
-                <a16:creationId xmlns:a16="http://schemas.microsoft.com/office/drawing/2014/main" id="{6C014428-17C8-DCCE-EC9B-28F85DF6D2E0}"/>
+                <a16:creationId xmlns:a16="http://schemas.microsoft.com/office/drawing/2014/main" id="{BEC0F555-F011-2A8D-EBC4-3D94F4818705}"/>
               </a:ext>
             </a:extLst>
           </p:cNvPr>
@@ -1856,7 +1856,7 @@
           <p:cNvPr id="5" name="テキスト プレースホルダー 4">
             <a:extLst>
               <a:ext uri="{FF2B5EF4-FFF2-40B4-BE49-F238E27FC236}">
-                <a16:creationId xmlns:a16="http://schemas.microsoft.com/office/drawing/2014/main" id="{A18C8933-B1FC-6D36-2F11-0EE6FED5DC64}"/>
+                <a16:creationId xmlns:a16="http://schemas.microsoft.com/office/drawing/2014/main" id="{E8DF3DA7-A0BB-957C-8833-5AA194DFF88A}"/>
               </a:ext>
             </a:extLst>
           </p:cNvPr>
@@ -1927,7 +1927,7 @@
           <p:cNvPr id="6" name="コンテンツ プレースホルダー 5">
             <a:extLst>
               <a:ext uri="{FF2B5EF4-FFF2-40B4-BE49-F238E27FC236}">
-                <a16:creationId xmlns:a16="http://schemas.microsoft.com/office/drawing/2014/main" id="{0925A28D-9A35-1471-E08A-342774848BC7}"/>
+                <a16:creationId xmlns:a16="http://schemas.microsoft.com/office/drawing/2014/main" id="{E41142C2-6567-0A57-2FE7-D172D923350B}"/>
               </a:ext>
             </a:extLst>
           </p:cNvPr>
@@ -2021,7 +2021,7 @@
           <p:cNvPr id="7" name="日付プレースホルダー 6">
             <a:extLst>
               <a:ext uri="{FF2B5EF4-FFF2-40B4-BE49-F238E27FC236}">
-                <a16:creationId xmlns:a16="http://schemas.microsoft.com/office/drawing/2014/main" id="{5A09D73F-7AA5-4515-C734-6AFAC5D24979}"/>
+                <a16:creationId xmlns:a16="http://schemas.microsoft.com/office/drawing/2014/main" id="{681A5EBE-648E-0ACE-FEEB-C12232BF28CB}"/>
               </a:ext>
             </a:extLst>
           </p:cNvPr>
@@ -2037,7 +2037,7 @@
           <a:bodyPr/>
           <a:lstStyle/>
           <a:p>
-            <a:fld id="{8439367F-274D-4BBC-90C2-F0C64D0ACC24}" type="datetimeFigureOut">
+            <a:fld id="{726F9719-F195-4A7D-880E-523B62E86B40}" type="datetimeFigureOut">
               <a:rPr kumimoji="1" lang="ja-JP" altLang="en-US" smtClean="0"/>
               <a:t>2026/7/30</a:t>
             </a:fld>
@@ -2050,7 +2050,7 @@
           <p:cNvPr id="8" name="フッター プレースホルダー 7">
             <a:extLst>
               <a:ext uri="{FF2B5EF4-FFF2-40B4-BE49-F238E27FC236}">
-                <a16:creationId xmlns:a16="http://schemas.microsoft.com/office/drawing/2014/main" id="{F732FE54-E870-ADF3-87B6-9C6DCD186595}"/>
+                <a16:creationId xmlns:a16="http://schemas.microsoft.com/office/drawing/2014/main" id="{28A3DD46-F607-220A-AC9B-2648C0A236C7}"/>
               </a:ext>
             </a:extLst>
           </p:cNvPr>
@@ -2075,7 +2075,7 @@
           <p:cNvPr id="9" name="スライド番号プレースホルダー 8">
             <a:extLst>
               <a:ext uri="{FF2B5EF4-FFF2-40B4-BE49-F238E27FC236}">
-                <a16:creationId xmlns:a16="http://schemas.microsoft.com/office/drawing/2014/main" id="{EE8C9FCF-85E9-8D27-6081-921EEB9AA55D}"/>
+                <a16:creationId xmlns:a16="http://schemas.microsoft.com/office/drawing/2014/main" id="{965EEE10-C75C-06D3-E9B5-DA84F26C4500}"/>
               </a:ext>
             </a:extLst>
           </p:cNvPr>
@@ -2091,7 +2091,7 @@
           <a:bodyPr/>
           <a:lstStyle/>
           <a:p>
-            <a:fld id="{59B490DF-494B-4AAE-BE1F-A36078D12FDA}" type="slidenum">
+            <a:fld id="{3FA5B6A3-4019-4767-B5D3-AAED3E725C3A}" type="slidenum">
               <a:rPr kumimoji="1" lang="ja-JP" altLang="en-US" smtClean="0"/>
               <a:t>‹#›</a:t>
             </a:fld>
@@ -2102,7 +2102,7 @@
     </p:spTree>
     <p:extLst>
       <p:ext uri="{BB962C8B-B14F-4D97-AF65-F5344CB8AC3E}">
-        <p14:creationId xmlns:p14="http://schemas.microsoft.com/office/powerpoint/2010/main" val="145618211"/>
+        <p14:creationId xmlns:p14="http://schemas.microsoft.com/office/powerpoint/2010/main" val="673093893"/>
       </p:ext>
     </p:extLst>
   </p:cSld>
@@ -2134,7 +2134,7 @@
           <p:cNvPr id="2" name="タイトル 1">
             <a:extLst>
               <a:ext uri="{FF2B5EF4-FFF2-40B4-BE49-F238E27FC236}">
-                <a16:creationId xmlns:a16="http://schemas.microsoft.com/office/drawing/2014/main" id="{C3E40D8C-03F2-6A32-C152-D34DC8BA5DF9}"/>
+                <a16:creationId xmlns:a16="http://schemas.microsoft.com/office/drawing/2014/main" id="{DD6E3171-D0B6-899B-9189-058A63A40777}"/>
               </a:ext>
             </a:extLst>
           </p:cNvPr>
@@ -2162,7 +2162,7 @@
           <p:cNvPr id="3" name="日付プレースホルダー 2">
             <a:extLst>
               <a:ext uri="{FF2B5EF4-FFF2-40B4-BE49-F238E27FC236}">
-                <a16:creationId xmlns:a16="http://schemas.microsoft.com/office/drawing/2014/main" id="{01A13FEC-74BA-9765-90F0-4328255A9EFA}"/>
+                <a16:creationId xmlns:a16="http://schemas.microsoft.com/office/drawing/2014/main" id="{0B5C8CA2-75BD-ED55-B025-AF4D12C5E16A}"/>
               </a:ext>
             </a:extLst>
           </p:cNvPr>
@@ -2178,7 +2178,7 @@
           <a:bodyPr/>
           <a:lstStyle/>
           <a:p>
-            <a:fld id="{8439367F-274D-4BBC-90C2-F0C64D0ACC24}" type="datetimeFigureOut">
+            <a:fld id="{726F9719-F195-4A7D-880E-523B62E86B40}" type="datetimeFigureOut">
               <a:rPr kumimoji="1" lang="ja-JP" altLang="en-US" smtClean="0"/>
               <a:t>2026/7/30</a:t>
             </a:fld>
@@ -2191,7 +2191,7 @@
           <p:cNvPr id="4" name="フッター プレースホルダー 3">
             <a:extLst>
               <a:ext uri="{FF2B5EF4-FFF2-40B4-BE49-F238E27FC236}">
-                <a16:creationId xmlns:a16="http://schemas.microsoft.com/office/drawing/2014/main" id="{FCA674AD-E021-A20E-3AD8-DCB82BAE5CDC}"/>
+                <a16:creationId xmlns:a16="http://schemas.microsoft.com/office/drawing/2014/main" id="{10259153-5F9B-6AA1-A0F9-CEB808232DDE}"/>
               </a:ext>
             </a:extLst>
           </p:cNvPr>
@@ -2216,7 +2216,7 @@
           <p:cNvPr id="5" name="スライド番号プレースホルダー 4">
             <a:extLst>
               <a:ext uri="{FF2B5EF4-FFF2-40B4-BE49-F238E27FC236}">
-                <a16:creationId xmlns:a16="http://schemas.microsoft.com/office/drawing/2014/main" id="{3353ED59-4094-CD8B-7FDA-968F43913B80}"/>
+                <a16:creationId xmlns:a16="http://schemas.microsoft.com/office/drawing/2014/main" id="{6F4F0544-359F-00E5-2A9A-B2D620B81C6F}"/>
               </a:ext>
             </a:extLst>
           </p:cNvPr>
@@ -2232,7 +2232,7 @@
           <a:bodyPr/>
           <a:lstStyle/>
           <a:p>
-            <a:fld id="{59B490DF-494B-4AAE-BE1F-A36078D12FDA}" type="slidenum">
+            <a:fld id="{3FA5B6A3-4019-4767-B5D3-AAED3E725C3A}" type="slidenum">
               <a:rPr kumimoji="1" lang="ja-JP" altLang="en-US" smtClean="0"/>
               <a:t>‹#›</a:t>
             </a:fld>
@@ -2243,7 +2243,7 @@
     </p:spTree>
     <p:extLst>
       <p:ext uri="{BB962C8B-B14F-4D97-AF65-F5344CB8AC3E}">
-        <p14:creationId xmlns:p14="http://schemas.microsoft.com/office/powerpoint/2010/main" val="4184109483"/>
+        <p14:creationId xmlns:p14="http://schemas.microsoft.com/office/powerpoint/2010/main" val="698040951"/>
       </p:ext>
     </p:extLst>
   </p:cSld>
@@ -2275,7 +2275,7 @@
           <p:cNvPr id="2" name="日付プレースホルダー 1">
             <a:extLst>
               <a:ext uri="{FF2B5EF4-FFF2-40B4-BE49-F238E27FC236}">
-                <a16:creationId xmlns:a16="http://schemas.microsoft.com/office/drawing/2014/main" id="{78EE57F8-708D-EDA6-2AC0-6C466BE4C1CF}"/>
+                <a16:creationId xmlns:a16="http://schemas.microsoft.com/office/drawing/2014/main" id="{864A51CC-5C45-3F16-98CC-1027CE170AC1}"/>
               </a:ext>
             </a:extLst>
           </p:cNvPr>
@@ -2291,7 +2291,7 @@
           <a:bodyPr/>
           <a:lstStyle/>
           <a:p>
-            <a:fld id="{8439367F-274D-4BBC-90C2-F0C64D0ACC24}" type="datetimeFigureOut">
+            <a:fld id="{726F9719-F195-4A7D-880E-523B62E86B40}" type="datetimeFigureOut">
               <a:rPr kumimoji="1" lang="ja-JP" altLang="en-US" smtClean="0"/>
               <a:t>2026/7/30</a:t>
             </a:fld>
@@ -2304,7 +2304,7 @@
           <p:cNvPr id="3" name="フッター プレースホルダー 2">
             <a:extLst>
               <a:ext uri="{FF2B5EF4-FFF2-40B4-BE49-F238E27FC236}">
-                <a16:creationId xmlns:a16="http://schemas.microsoft.com/office/drawing/2014/main" id="{53B57704-0451-23BF-97F9-DF54038AF610}"/>
+                <a16:creationId xmlns:a16="http://schemas.microsoft.com/office/drawing/2014/main" id="{3110CEE2-EC09-D712-B362-D560D641DABD}"/>
               </a:ext>
             </a:extLst>
           </p:cNvPr>
@@ -2329,7 +2329,7 @@
           <p:cNvPr id="4" name="スライド番号プレースホルダー 3">
             <a:extLst>
               <a:ext uri="{FF2B5EF4-FFF2-40B4-BE49-F238E27FC236}">
-                <a16:creationId xmlns:a16="http://schemas.microsoft.com/office/drawing/2014/main" id="{100D981E-AE43-4B4A-0A45-28403B758DD0}"/>
+                <a16:creationId xmlns:a16="http://schemas.microsoft.com/office/drawing/2014/main" id="{59F0DEB8-CA6D-8079-9B5A-4295F26E028E}"/>
               </a:ext>
             </a:extLst>
           </p:cNvPr>
@@ -2345,7 +2345,7 @@
           <a:bodyPr/>
           <a:lstStyle/>
           <a:p>
-            <a:fld id="{59B490DF-494B-4AAE-BE1F-A36078D12FDA}" type="slidenum">
+            <a:fld id="{3FA5B6A3-4019-4767-B5D3-AAED3E725C3A}" type="slidenum">
               <a:rPr kumimoji="1" lang="ja-JP" altLang="en-US" smtClean="0"/>
               <a:t>‹#›</a:t>
             </a:fld>
@@ -2356,7 +2356,7 @@
     </p:spTree>
     <p:extLst>
       <p:ext uri="{BB962C8B-B14F-4D97-AF65-F5344CB8AC3E}">
-        <p14:creationId xmlns:p14="http://schemas.microsoft.com/office/powerpoint/2010/main" val="3969281975"/>
+        <p14:creationId xmlns:p14="http://schemas.microsoft.com/office/powerpoint/2010/main" val="1950673558"/>
       </p:ext>
     </p:extLst>
   </p:cSld>
@@ -2388,7 +2388,7 @@
           <p:cNvPr id="2" name="タイトル 1">
             <a:extLst>
               <a:ext uri="{FF2B5EF4-FFF2-40B4-BE49-F238E27FC236}">
-                <a16:creationId xmlns:a16="http://schemas.microsoft.com/office/drawing/2014/main" id="{D877F680-8C25-3B47-6219-5304E74B95DC}"/>
+                <a16:creationId xmlns:a16="http://schemas.microsoft.com/office/drawing/2014/main" id="{96F6D27A-E47F-3266-A43C-4A35F5A78961}"/>
               </a:ext>
             </a:extLst>
           </p:cNvPr>
@@ -2425,7 +2425,7 @@
           <p:cNvPr id="3" name="コンテンツ プレースホルダー 2">
             <a:extLst>
               <a:ext uri="{FF2B5EF4-FFF2-40B4-BE49-F238E27FC236}">
-                <a16:creationId xmlns:a16="http://schemas.microsoft.com/office/drawing/2014/main" id="{2528D294-CDDE-6CDC-E4F1-79905FDE5619}"/>
+                <a16:creationId xmlns:a16="http://schemas.microsoft.com/office/drawing/2014/main" id="{9502D8AF-B7DB-C6FA-9E92-D6B3AF608730}"/>
               </a:ext>
             </a:extLst>
           </p:cNvPr>
@@ -2547,7 +2547,7 @@
           <p:cNvPr id="4" name="テキスト プレースホルダー 3">
             <a:extLst>
               <a:ext uri="{FF2B5EF4-FFF2-40B4-BE49-F238E27FC236}">
-                <a16:creationId xmlns:a16="http://schemas.microsoft.com/office/drawing/2014/main" id="{69B099DD-3172-7F2F-AC6B-29C5227A84FA}"/>
+                <a16:creationId xmlns:a16="http://schemas.microsoft.com/office/drawing/2014/main" id="{0DF37DA0-6618-35B7-9C67-DBC48F06FDD1}"/>
               </a:ext>
             </a:extLst>
           </p:cNvPr>
@@ -2618,7 +2618,7 @@
           <p:cNvPr id="5" name="日付プレースホルダー 4">
             <a:extLst>
               <a:ext uri="{FF2B5EF4-FFF2-40B4-BE49-F238E27FC236}">
-                <a16:creationId xmlns:a16="http://schemas.microsoft.com/office/drawing/2014/main" id="{A4C25147-347A-BFDE-D4CC-48040ABC32FC}"/>
+                <a16:creationId xmlns:a16="http://schemas.microsoft.com/office/drawing/2014/main" id="{90201721-7D4F-E892-7AC6-1D31A7DFEC70}"/>
               </a:ext>
             </a:extLst>
           </p:cNvPr>
@@ -2634,7 +2634,7 @@
           <a:bodyPr/>
           <a:lstStyle/>
           <a:p>
-            <a:fld id="{8439367F-274D-4BBC-90C2-F0C64D0ACC24}" type="datetimeFigureOut">
+            <a:fld id="{726F9719-F195-4A7D-880E-523B62E86B40}" type="datetimeFigureOut">
               <a:rPr kumimoji="1" lang="ja-JP" altLang="en-US" smtClean="0"/>
               <a:t>2026/7/30</a:t>
             </a:fld>
@@ -2647,7 +2647,7 @@
           <p:cNvPr id="6" name="フッター プレースホルダー 5">
             <a:extLst>
               <a:ext uri="{FF2B5EF4-FFF2-40B4-BE49-F238E27FC236}">
-                <a16:creationId xmlns:a16="http://schemas.microsoft.com/office/drawing/2014/main" id="{02489C6B-B750-0AA4-6172-20B2EBD385CE}"/>
+                <a16:creationId xmlns:a16="http://schemas.microsoft.com/office/drawing/2014/main" id="{EBFDE8A3-274F-EA9E-D8C6-BAD2340DA22D}"/>
               </a:ext>
             </a:extLst>
           </p:cNvPr>
@@ -2672,7 +2672,7 @@
           <p:cNvPr id="7" name="スライド番号プレースホルダー 6">
             <a:extLst>
               <a:ext uri="{FF2B5EF4-FFF2-40B4-BE49-F238E27FC236}">
-                <a16:creationId xmlns:a16="http://schemas.microsoft.com/office/drawing/2014/main" id="{193020D6-9E47-8E94-2CB0-DECF03A41B5D}"/>
+                <a16:creationId xmlns:a16="http://schemas.microsoft.com/office/drawing/2014/main" id="{03137954-34C9-1AF6-94DC-2BF090988FD8}"/>
               </a:ext>
             </a:extLst>
           </p:cNvPr>
@@ -2688,7 +2688,7 @@
           <a:bodyPr/>
           <a:lstStyle/>
           <a:p>
-            <a:fld id="{59B490DF-494B-4AAE-BE1F-A36078D12FDA}" type="slidenum">
+            <a:fld id="{3FA5B6A3-4019-4767-B5D3-AAED3E725C3A}" type="slidenum">
               <a:rPr kumimoji="1" lang="ja-JP" altLang="en-US" smtClean="0"/>
               <a:t>‹#›</a:t>
             </a:fld>
@@ -2699,7 +2699,7 @@
     </p:spTree>
     <p:extLst>
       <p:ext uri="{BB962C8B-B14F-4D97-AF65-F5344CB8AC3E}">
-        <p14:creationId xmlns:p14="http://schemas.microsoft.com/office/powerpoint/2010/main" val="1449007556"/>
+        <p14:creationId xmlns:p14="http://schemas.microsoft.com/office/powerpoint/2010/main" val="1791132900"/>
       </p:ext>
     </p:extLst>
   </p:cSld>
@@ -2731,7 +2731,7 @@
           <p:cNvPr id="2" name="タイトル 1">
             <a:extLst>
               <a:ext uri="{FF2B5EF4-FFF2-40B4-BE49-F238E27FC236}">
-                <a16:creationId xmlns:a16="http://schemas.microsoft.com/office/drawing/2014/main" id="{4463DE9A-76A2-A87A-3AEE-4ED38CDC6F5C}"/>
+                <a16:creationId xmlns:a16="http://schemas.microsoft.com/office/drawing/2014/main" id="{A7862E23-11AA-5B28-7883-29550191363F}"/>
               </a:ext>
             </a:extLst>
           </p:cNvPr>
@@ -2768,7 +2768,7 @@
           <p:cNvPr id="3" name="図プレースホルダー 2">
             <a:extLst>
               <a:ext uri="{FF2B5EF4-FFF2-40B4-BE49-F238E27FC236}">
-                <a16:creationId xmlns:a16="http://schemas.microsoft.com/office/drawing/2014/main" id="{0C19FF17-7456-2B86-12DB-7E5BDB743F4B}"/>
+                <a16:creationId xmlns:a16="http://schemas.microsoft.com/office/drawing/2014/main" id="{22F736DB-4FF2-6D7B-8D86-461FD677DD2E}"/>
               </a:ext>
             </a:extLst>
           </p:cNvPr>
@@ -2835,7 +2835,7 @@
           <p:cNvPr id="4" name="テキスト プレースホルダー 3">
             <a:extLst>
               <a:ext uri="{FF2B5EF4-FFF2-40B4-BE49-F238E27FC236}">
-                <a16:creationId xmlns:a16="http://schemas.microsoft.com/office/drawing/2014/main" id="{AB1DE174-29E0-799C-8F8B-005B8FB33C15}"/>
+                <a16:creationId xmlns:a16="http://schemas.microsoft.com/office/drawing/2014/main" id="{C94256F2-9ACE-0D66-7871-CED52FE7A23F}"/>
               </a:ext>
             </a:extLst>
           </p:cNvPr>
@@ -2906,7 +2906,7 @@
           <p:cNvPr id="5" name="日付プレースホルダー 4">
             <a:extLst>
               <a:ext uri="{FF2B5EF4-FFF2-40B4-BE49-F238E27FC236}">
-                <a16:creationId xmlns:a16="http://schemas.microsoft.com/office/drawing/2014/main" id="{C78A30F3-A3B7-AB76-E8DE-0C53A54F3902}"/>
+                <a16:creationId xmlns:a16="http://schemas.microsoft.com/office/drawing/2014/main" id="{F719CA6E-19FE-8193-1A6C-BE81B3CA96BF}"/>
               </a:ext>
             </a:extLst>
           </p:cNvPr>
@@ -2922,7 +2922,7 @@
           <a:bodyPr/>
           <a:lstStyle/>
           <a:p>
-            <a:fld id="{8439367F-274D-4BBC-90C2-F0C64D0ACC24}" type="datetimeFigureOut">
+            <a:fld id="{726F9719-F195-4A7D-880E-523B62E86B40}" type="datetimeFigureOut">
               <a:rPr kumimoji="1" lang="ja-JP" altLang="en-US" smtClean="0"/>
               <a:t>2026/7/30</a:t>
             </a:fld>
@@ -2935,7 +2935,7 @@
           <p:cNvPr id="6" name="フッター プレースホルダー 5">
             <a:extLst>
               <a:ext uri="{FF2B5EF4-FFF2-40B4-BE49-F238E27FC236}">
-                <a16:creationId xmlns:a16="http://schemas.microsoft.com/office/drawing/2014/main" id="{D34F848D-8882-C3ED-82D2-A306DD9BC820}"/>
+                <a16:creationId xmlns:a16="http://schemas.microsoft.com/office/drawing/2014/main" id="{1C585852-B409-03FC-38C9-2DDB96220C82}"/>
               </a:ext>
             </a:extLst>
           </p:cNvPr>
@@ -2960,7 +2960,7 @@
           <p:cNvPr id="7" name="スライド番号プレースホルダー 6">
             <a:extLst>
               <a:ext uri="{FF2B5EF4-FFF2-40B4-BE49-F238E27FC236}">
-                <a16:creationId xmlns:a16="http://schemas.microsoft.com/office/drawing/2014/main" id="{DEA672EE-BCAD-7F87-D120-1C7A2E2BFC8A}"/>
+                <a16:creationId xmlns:a16="http://schemas.microsoft.com/office/drawing/2014/main" id="{ADD9D6AB-16DA-09D9-ECF6-1C9BA3CDC087}"/>
               </a:ext>
             </a:extLst>
           </p:cNvPr>
@@ -2976,7 +2976,7 @@
           <a:bodyPr/>
           <a:lstStyle/>
           <a:p>
-            <a:fld id="{59B490DF-494B-4AAE-BE1F-A36078D12FDA}" type="slidenum">
+            <a:fld id="{3FA5B6A3-4019-4767-B5D3-AAED3E725C3A}" type="slidenum">
               <a:rPr kumimoji="1" lang="ja-JP" altLang="en-US" smtClean="0"/>
               <a:t>‹#›</a:t>
             </a:fld>
@@ -2987,7 +2987,7 @@
     </p:spTree>
     <p:extLst>
       <p:ext uri="{BB962C8B-B14F-4D97-AF65-F5344CB8AC3E}">
-        <p14:creationId xmlns:p14="http://schemas.microsoft.com/office/powerpoint/2010/main" val="1601026937"/>
+        <p14:creationId xmlns:p14="http://schemas.microsoft.com/office/powerpoint/2010/main" val="513423220"/>
       </p:ext>
     </p:extLst>
   </p:cSld>
@@ -3024,7 +3024,7 @@
           <p:cNvPr id="2" name="タイトル プレースホルダー 1">
             <a:extLst>
               <a:ext uri="{FF2B5EF4-FFF2-40B4-BE49-F238E27FC236}">
-                <a16:creationId xmlns:a16="http://schemas.microsoft.com/office/drawing/2014/main" id="{9C9DC2C9-EEA1-3F21-E61E-0709002A9035}"/>
+                <a16:creationId xmlns:a16="http://schemas.microsoft.com/office/drawing/2014/main" id="{5D37A807-8CE6-FEC9-A0DE-F419740EC3BD}"/>
               </a:ext>
             </a:extLst>
           </p:cNvPr>
@@ -3062,7 +3062,7 @@
           <p:cNvPr id="3" name="テキスト プレースホルダー 2">
             <a:extLst>
               <a:ext uri="{FF2B5EF4-FFF2-40B4-BE49-F238E27FC236}">
-                <a16:creationId xmlns:a16="http://schemas.microsoft.com/office/drawing/2014/main" id="{21D55AEA-08A6-3DF3-C112-E72CE48D6427}"/>
+                <a16:creationId xmlns:a16="http://schemas.microsoft.com/office/drawing/2014/main" id="{139A7C26-36AE-DB9B-84D1-C5AC43B9F4B8}"/>
               </a:ext>
             </a:extLst>
           </p:cNvPr>
@@ -3161,7 +3161,7 @@
           <p:cNvPr id="4" name="日付プレースホルダー 3">
             <a:extLst>
               <a:ext uri="{FF2B5EF4-FFF2-40B4-BE49-F238E27FC236}">
-                <a16:creationId xmlns:a16="http://schemas.microsoft.com/office/drawing/2014/main" id="{22E029A9-4B2F-2805-5E38-AF82C9C68F37}"/>
+                <a16:creationId xmlns:a16="http://schemas.microsoft.com/office/drawing/2014/main" id="{776A7ACF-98F8-5AF7-A59B-D4B226760F03}"/>
               </a:ext>
             </a:extLst>
           </p:cNvPr>
@@ -3195,7 +3195,7 @@
             </a:lvl1pPr>
           </a:lstStyle>
           <a:p>
-            <a:fld id="{8439367F-274D-4BBC-90C2-F0C64D0ACC24}" type="datetimeFigureOut">
+            <a:fld id="{726F9719-F195-4A7D-880E-523B62E86B40}" type="datetimeFigureOut">
               <a:rPr kumimoji="1" lang="ja-JP" altLang="en-US" smtClean="0"/>
               <a:t>2026/7/30</a:t>
             </a:fld>
@@ -3208,7 +3208,7 @@
           <p:cNvPr id="5" name="フッター プレースホルダー 4">
             <a:extLst>
               <a:ext uri="{FF2B5EF4-FFF2-40B4-BE49-F238E27FC236}">
-                <a16:creationId xmlns:a16="http://schemas.microsoft.com/office/drawing/2014/main" id="{69D000B6-4949-B55F-9A57-34F028411901}"/>
+                <a16:creationId xmlns:a16="http://schemas.microsoft.com/office/drawing/2014/main" id="{C6EE5971-CA9B-78FA-678D-9E1262217AFB}"/>
               </a:ext>
             </a:extLst>
           </p:cNvPr>
@@ -3251,7 +3251,7 @@
           <p:cNvPr id="6" name="スライド番号プレースホルダー 5">
             <a:extLst>
               <a:ext uri="{FF2B5EF4-FFF2-40B4-BE49-F238E27FC236}">
-                <a16:creationId xmlns:a16="http://schemas.microsoft.com/office/drawing/2014/main" id="{314012EB-B18C-2290-0AF2-11C4CEA779F2}"/>
+                <a16:creationId xmlns:a16="http://schemas.microsoft.com/office/drawing/2014/main" id="{EF58FBAB-EA5A-A250-4EF5-F95FB96EB03C}"/>
               </a:ext>
             </a:extLst>
           </p:cNvPr>
@@ -3285,7 +3285,7 @@
             </a:lvl1pPr>
           </a:lstStyle>
           <a:p>
-            <a:fld id="{59B490DF-494B-4AAE-BE1F-A36078D12FDA}" type="slidenum">
+            <a:fld id="{3FA5B6A3-4019-4767-B5D3-AAED3E725C3A}" type="slidenum">
               <a:rPr kumimoji="1" lang="ja-JP" altLang="en-US" smtClean="0"/>
               <a:t>‹#›</a:t>
             </a:fld>
@@ -3296,7 +3296,7 @@
     </p:spTree>
     <p:extLst>
       <p:ext uri="{BB962C8B-B14F-4D97-AF65-F5344CB8AC3E}">
-        <p14:creationId xmlns:p14="http://schemas.microsoft.com/office/powerpoint/2010/main" val="3290703774"/>
+        <p14:creationId xmlns:p14="http://schemas.microsoft.com/office/powerpoint/2010/main" val="1790951227"/>
       </p:ext>
     </p:extLst>
   </p:cSld>
@@ -3619,7 +3619,7 @@
           <p:cNvPr id="2" name="テキスト ボックス 1">
             <a:extLst>
               <a:ext uri="{FF2B5EF4-FFF2-40B4-BE49-F238E27FC236}">
-                <a16:creationId xmlns:a16="http://schemas.microsoft.com/office/drawing/2014/main" id="{8C9BE1F5-ED52-543E-A0BA-1FBB3400F685}"/>
+                <a16:creationId xmlns:a16="http://schemas.microsoft.com/office/drawing/2014/main" id="{6B1E565D-D2BB-397C-CE89-3EA83D1D549E}"/>
               </a:ext>
             </a:extLst>
           </p:cNvPr>
@@ -3665,7 +3665,7 @@
           <p:cNvPr id="3" name="テキスト ボックス 2">
             <a:extLst>
               <a:ext uri="{FF2B5EF4-FFF2-40B4-BE49-F238E27FC236}">
-                <a16:creationId xmlns:a16="http://schemas.microsoft.com/office/drawing/2014/main" id="{8A94C570-5858-B59F-D473-12BAC984F461}"/>
+                <a16:creationId xmlns:a16="http://schemas.microsoft.com/office/drawing/2014/main" id="{A591F775-4B48-DB2C-D768-4A9DAF544EA8}"/>
               </a:ext>
             </a:extLst>
           </p:cNvPr>
@@ -3714,7 +3714,7 @@
           <p:cNvPr id="4" name="テキスト ボックス 3">
             <a:extLst>
               <a:ext uri="{FF2B5EF4-FFF2-40B4-BE49-F238E27FC236}">
-                <a16:creationId xmlns:a16="http://schemas.microsoft.com/office/drawing/2014/main" id="{E06093D3-7013-E7A6-DFA3-8F3DA5607DEC}"/>
+                <a16:creationId xmlns:a16="http://schemas.microsoft.com/office/drawing/2014/main" id="{1CB53D7C-1263-E8E5-B529-9EC4BEC5FA5F}"/>
               </a:ext>
             </a:extLst>
           </p:cNvPr>
@@ -3754,7 +3754,7 @@
           <p:cNvPr id="5" name="テキスト ボックス 4">
             <a:extLst>
               <a:ext uri="{FF2B5EF4-FFF2-40B4-BE49-F238E27FC236}">
-                <a16:creationId xmlns:a16="http://schemas.microsoft.com/office/drawing/2014/main" id="{61A9EAFD-D566-D498-C2D2-165C7447B4A0}"/>
+                <a16:creationId xmlns:a16="http://schemas.microsoft.com/office/drawing/2014/main" id="{43453087-CB6F-5EFC-707F-572089E8E965}"/>
               </a:ext>
             </a:extLst>
           </p:cNvPr>
@@ -3801,7 +3801,7 @@
             <a:hlinkClick r:id="" action="ppaction://media"/>
             <a:extLst>
               <a:ext uri="{FF2B5EF4-FFF2-40B4-BE49-F238E27FC236}">
-                <a16:creationId xmlns:a16="http://schemas.microsoft.com/office/drawing/2014/main" id="{41CE13AA-AFE1-F4D8-5166-CB74968C851F}"/>
+                <a16:creationId xmlns:a16="http://schemas.microsoft.com/office/drawing/2014/main" id="{8C4CC75A-70F5-845A-362E-D800DA0B0F4D}"/>
               </a:ext>
             </a:extLst>
           </p:cNvPr>
@@ -3836,7 +3836,7 @@
     </p:spTree>
     <p:extLst>
       <p:ext uri="{BB962C8B-B14F-4D97-AF65-F5344CB8AC3E}">
-        <p14:creationId xmlns:p14="http://schemas.microsoft.com/office/powerpoint/2010/main" val="2880002924"/>
+        <p14:creationId xmlns:p14="http://schemas.microsoft.com/office/powerpoint/2010/main" val="3700204234"/>
       </p:ext>
     </p:extLst>
   </p:cSld>
@@ -3960,7 +3960,7 @@
           <p:cNvPr id="2" name="テキスト ボックス 1">
             <a:extLst>
               <a:ext uri="{FF2B5EF4-FFF2-40B4-BE49-F238E27FC236}">
-                <a16:creationId xmlns:a16="http://schemas.microsoft.com/office/drawing/2014/main" id="{D435971F-0DDC-BD58-B180-F30F5F99F418}"/>
+                <a16:creationId xmlns:a16="http://schemas.microsoft.com/office/drawing/2014/main" id="{404D5A8D-99C5-998E-01F8-ABBE674F2E1C}"/>
               </a:ext>
             </a:extLst>
           </p:cNvPr>
@@ -4006,7 +4006,7 @@
           <p:cNvPr id="3" name="テキスト ボックス 2">
             <a:extLst>
               <a:ext uri="{FF2B5EF4-FFF2-40B4-BE49-F238E27FC236}">
-                <a16:creationId xmlns:a16="http://schemas.microsoft.com/office/drawing/2014/main" id="{157F0418-CEFD-5104-24D1-8C97A901B771}"/>
+                <a16:creationId xmlns:a16="http://schemas.microsoft.com/office/drawing/2014/main" id="{BC55A434-A239-E1F4-4FEC-C7F604869412}"/>
               </a:ext>
             </a:extLst>
           </p:cNvPr>
@@ -4046,7 +4046,7 @@
           <p:cNvPr id="4" name="テキスト ボックス 3">
             <a:extLst>
               <a:ext uri="{FF2B5EF4-FFF2-40B4-BE49-F238E27FC236}">
-                <a16:creationId xmlns:a16="http://schemas.microsoft.com/office/drawing/2014/main" id="{B3AA9C85-3C60-ECFB-89B0-77DC311EC0F6}"/>
+                <a16:creationId xmlns:a16="http://schemas.microsoft.com/office/drawing/2014/main" id="{9864242F-8F27-01C8-82CE-31105702E8A3}"/>
               </a:ext>
             </a:extLst>
           </p:cNvPr>
@@ -4110,7 +4110,7 @@
           <p:cNvPr id="5" name="テキスト ボックス 4">
             <a:extLst>
               <a:ext uri="{FF2B5EF4-FFF2-40B4-BE49-F238E27FC236}">
-                <a16:creationId xmlns:a16="http://schemas.microsoft.com/office/drawing/2014/main" id="{080AE0E2-6D25-2DE8-5728-5DB9CEC2525D}"/>
+                <a16:creationId xmlns:a16="http://schemas.microsoft.com/office/drawing/2014/main" id="{8C847A25-D5E9-3C5C-D6CC-F1E65097A84F}"/>
               </a:ext>
             </a:extLst>
           </p:cNvPr>
@@ -4157,7 +4157,7 @@
             <a:hlinkClick r:id="" action="ppaction://media"/>
             <a:extLst>
               <a:ext uri="{FF2B5EF4-FFF2-40B4-BE49-F238E27FC236}">
-                <a16:creationId xmlns:a16="http://schemas.microsoft.com/office/drawing/2014/main" id="{79F9F8B7-11D9-7068-24F4-614C3588CE54}"/>
+                <a16:creationId xmlns:a16="http://schemas.microsoft.com/office/drawing/2014/main" id="{3D3EC179-4396-2B44-11FD-68B18AD5A3AB}"/>
               </a:ext>
             </a:extLst>
           </p:cNvPr>
@@ -4192,7 +4192,7 @@
     </p:spTree>
     <p:extLst>
       <p:ext uri="{BB962C8B-B14F-4D97-AF65-F5344CB8AC3E}">
-        <p14:creationId xmlns:p14="http://schemas.microsoft.com/office/powerpoint/2010/main" val="803165113"/>
+        <p14:creationId xmlns:p14="http://schemas.microsoft.com/office/powerpoint/2010/main" val="2865298941"/>
       </p:ext>
     </p:extLst>
   </p:cSld>
@@ -4316,7 +4316,7 @@
           <p:cNvPr id="2" name="テキスト ボックス 1">
             <a:extLst>
               <a:ext uri="{FF2B5EF4-FFF2-40B4-BE49-F238E27FC236}">
-                <a16:creationId xmlns:a16="http://schemas.microsoft.com/office/drawing/2014/main" id="{64C378E9-EAA6-6092-9A04-EE785EF3637B}"/>
+                <a16:creationId xmlns:a16="http://schemas.microsoft.com/office/drawing/2014/main" id="{93C3268F-31A8-EF58-2598-C2A80A3D3237}"/>
               </a:ext>
             </a:extLst>
           </p:cNvPr>
@@ -4362,7 +4362,7 @@
           <p:cNvPr id="3" name="テキスト ボックス 2">
             <a:extLst>
               <a:ext uri="{FF2B5EF4-FFF2-40B4-BE49-F238E27FC236}">
-                <a16:creationId xmlns:a16="http://schemas.microsoft.com/office/drawing/2014/main" id="{2C1E9E6A-3F9C-459E-15F5-06CBD4129504}"/>
+                <a16:creationId xmlns:a16="http://schemas.microsoft.com/office/drawing/2014/main" id="{A95479F5-12E1-66B0-9625-E7ECAB7CDEFF}"/>
               </a:ext>
             </a:extLst>
           </p:cNvPr>
@@ -4402,7 +4402,7 @@
           <p:cNvPr id="4" name="テキスト ボックス 3">
             <a:extLst>
               <a:ext uri="{FF2B5EF4-FFF2-40B4-BE49-F238E27FC236}">
-                <a16:creationId xmlns:a16="http://schemas.microsoft.com/office/drawing/2014/main" id="{5ADA1A71-A236-FD5C-A056-3A7DCAA72386}"/>
+                <a16:creationId xmlns:a16="http://schemas.microsoft.com/office/drawing/2014/main" id="{571289F5-5DBB-4824-E9D4-809B61C7F065}"/>
               </a:ext>
             </a:extLst>
           </p:cNvPr>
@@ -4497,7 +4497,7 @@
           <p:cNvPr id="5" name="テキスト ボックス 4">
             <a:extLst>
               <a:ext uri="{FF2B5EF4-FFF2-40B4-BE49-F238E27FC236}">
-                <a16:creationId xmlns:a16="http://schemas.microsoft.com/office/drawing/2014/main" id="{48A43046-4A2A-177C-176C-8BCCAE1CBB13}"/>
+                <a16:creationId xmlns:a16="http://schemas.microsoft.com/office/drawing/2014/main" id="{1CF24A32-2693-685E-0E92-900B98EEB351}"/>
               </a:ext>
             </a:extLst>
           </p:cNvPr>
@@ -4544,7 +4544,7 @@
             <a:hlinkClick r:id="" action="ppaction://media"/>
             <a:extLst>
               <a:ext uri="{FF2B5EF4-FFF2-40B4-BE49-F238E27FC236}">
-                <a16:creationId xmlns:a16="http://schemas.microsoft.com/office/drawing/2014/main" id="{D551B77A-E6BF-A313-D875-280FB90F76FA}"/>
+                <a16:creationId xmlns:a16="http://schemas.microsoft.com/office/drawing/2014/main" id="{D31E6538-ABEF-6DAB-CA20-52323921FFFC}"/>
               </a:ext>
             </a:extLst>
           </p:cNvPr>
@@ -4579,7 +4579,7 @@
     </p:spTree>
     <p:extLst>
       <p:ext uri="{BB962C8B-B14F-4D97-AF65-F5344CB8AC3E}">
-        <p14:creationId xmlns:p14="http://schemas.microsoft.com/office/powerpoint/2010/main" val="3047098307"/>
+        <p14:creationId xmlns:p14="http://schemas.microsoft.com/office/powerpoint/2010/main" val="1204425101"/>
       </p:ext>
     </p:extLst>
   </p:cSld>
@@ -4703,7 +4703,7 @@
           <p:cNvPr id="2" name="テキスト ボックス 1">
             <a:extLst>
               <a:ext uri="{FF2B5EF4-FFF2-40B4-BE49-F238E27FC236}">
-                <a16:creationId xmlns:a16="http://schemas.microsoft.com/office/drawing/2014/main" id="{C00E2559-A7F6-48C1-52F8-FAAB80A5798E}"/>
+                <a16:creationId xmlns:a16="http://schemas.microsoft.com/office/drawing/2014/main" id="{C820C48C-3BF0-A4A8-24B6-72799945D974}"/>
               </a:ext>
             </a:extLst>
           </p:cNvPr>
@@ -4749,7 +4749,7 @@
           <p:cNvPr id="3" name="テキスト ボックス 2">
             <a:extLst>
               <a:ext uri="{FF2B5EF4-FFF2-40B4-BE49-F238E27FC236}">
-                <a16:creationId xmlns:a16="http://schemas.microsoft.com/office/drawing/2014/main" id="{B6242311-9538-8FE3-62BA-90253E57731E}"/>
+                <a16:creationId xmlns:a16="http://schemas.microsoft.com/office/drawing/2014/main" id="{FAF56839-7E0E-4945-FC5D-2372E29CB59C}"/>
               </a:ext>
             </a:extLst>
           </p:cNvPr>
@@ -4789,7 +4789,7 @@
           <p:cNvPr id="4" name="テキスト ボックス 3">
             <a:extLst>
               <a:ext uri="{FF2B5EF4-FFF2-40B4-BE49-F238E27FC236}">
-                <a16:creationId xmlns:a16="http://schemas.microsoft.com/office/drawing/2014/main" id="{2EF084CC-58BB-0058-A5C2-C44258F1FE8B}"/>
+                <a16:creationId xmlns:a16="http://schemas.microsoft.com/office/drawing/2014/main" id="{84436ED3-791F-9AD7-BE89-81970511D9FF}"/>
               </a:ext>
             </a:extLst>
           </p:cNvPr>
@@ -4899,7 +4899,7 @@
           <p:cNvPr id="5" name="テキスト ボックス 4">
             <a:extLst>
               <a:ext uri="{FF2B5EF4-FFF2-40B4-BE49-F238E27FC236}">
-                <a16:creationId xmlns:a16="http://schemas.microsoft.com/office/drawing/2014/main" id="{E6354371-9C53-4ADE-46F9-65BA413D60F9}"/>
+                <a16:creationId xmlns:a16="http://schemas.microsoft.com/office/drawing/2014/main" id="{C5343514-25F3-1261-383C-EEBD7E7F16C0}"/>
               </a:ext>
             </a:extLst>
           </p:cNvPr>
@@ -4946,7 +4946,7 @@
             <a:hlinkClick r:id="" action="ppaction://media"/>
             <a:extLst>
               <a:ext uri="{FF2B5EF4-FFF2-40B4-BE49-F238E27FC236}">
-                <a16:creationId xmlns:a16="http://schemas.microsoft.com/office/drawing/2014/main" id="{88A38E5C-C5C2-C469-A89A-985E36EDA438}"/>
+                <a16:creationId xmlns:a16="http://schemas.microsoft.com/office/drawing/2014/main" id="{1BE4C64F-E0A6-621E-7516-EB4EC4A94E55}"/>
               </a:ext>
             </a:extLst>
           </p:cNvPr>
@@ -4981,7 +4981,7 @@
     </p:spTree>
     <p:extLst>
       <p:ext uri="{BB962C8B-B14F-4D97-AF65-F5344CB8AC3E}">
-        <p14:creationId xmlns:p14="http://schemas.microsoft.com/office/powerpoint/2010/main" val="2739604276"/>
+        <p14:creationId xmlns:p14="http://schemas.microsoft.com/office/powerpoint/2010/main" val="1550097020"/>
       </p:ext>
     </p:extLst>
   </p:cSld>
@@ -5105,7 +5105,7 @@
           <p:cNvPr id="2" name="テキスト ボックス 1">
             <a:extLst>
               <a:ext uri="{FF2B5EF4-FFF2-40B4-BE49-F238E27FC236}">
-                <a16:creationId xmlns:a16="http://schemas.microsoft.com/office/drawing/2014/main" id="{A2D89986-BB12-89D3-B564-7B0A48980904}"/>
+                <a16:creationId xmlns:a16="http://schemas.microsoft.com/office/drawing/2014/main" id="{4AE4A715-920D-B1CF-3F58-EEB9D016D64D}"/>
               </a:ext>
             </a:extLst>
           </p:cNvPr>
@@ -5151,7 +5151,7 @@
           <p:cNvPr id="3" name="テキスト ボックス 2">
             <a:extLst>
               <a:ext uri="{FF2B5EF4-FFF2-40B4-BE49-F238E27FC236}">
-                <a16:creationId xmlns:a16="http://schemas.microsoft.com/office/drawing/2014/main" id="{E9089FDF-2876-A19A-A1F3-B0E6543EE280}"/>
+                <a16:creationId xmlns:a16="http://schemas.microsoft.com/office/drawing/2014/main" id="{74A3FDD0-150E-1202-38BF-B2971F02C511}"/>
               </a:ext>
             </a:extLst>
           </p:cNvPr>
@@ -5191,7 +5191,7 @@
           <p:cNvPr id="4" name="テキスト ボックス 3">
             <a:extLst>
               <a:ext uri="{FF2B5EF4-FFF2-40B4-BE49-F238E27FC236}">
-                <a16:creationId xmlns:a16="http://schemas.microsoft.com/office/drawing/2014/main" id="{DE5D3F1F-48BC-B836-6FBB-458DAE9D2476}"/>
+                <a16:creationId xmlns:a16="http://schemas.microsoft.com/office/drawing/2014/main" id="{9887B4E5-2F6D-A099-8F27-3A34C814749E}"/>
               </a:ext>
             </a:extLst>
           </p:cNvPr>
@@ -5215,20 +5215,14 @@
           <a:lstStyle/>
           <a:p>
             <a:r>
-              <a:rPr kumimoji="1" lang="en-US" altLang="ja-JP" sz="2000">
+              <a:rPr kumimoji="1" lang="ja-JP" altLang="en-US" sz="2000">
                 <a:solidFill>
                   <a:srgbClr val="333333"/>
                 </a:solidFill>
                 <a:latin typeface="Arial" panose="020B0604020202020204" pitchFamily="34" charset="0"/>
               </a:rPr>
-              <a:t>Set confirmed custom domain</a:t>
-            </a:r>
-            <a:endParaRPr kumimoji="1" lang="ja-JP" altLang="en-US" sz="2000">
-              <a:solidFill>
-                <a:srgbClr val="333333"/>
-              </a:solidFill>
-              <a:latin typeface="Arial" panose="020B0604020202020204" pitchFamily="34" charset="0"/>
-            </a:endParaRPr>
+              <a:t>直近のコミットでは、実装の見直しと継続的な改善が行われました。</a:t>
+            </a:r>
           </a:p>
         </p:txBody>
       </p:sp>
@@ -5237,7 +5231,7 @@
           <p:cNvPr id="5" name="テキスト ボックス 4">
             <a:extLst>
               <a:ext uri="{FF2B5EF4-FFF2-40B4-BE49-F238E27FC236}">
-                <a16:creationId xmlns:a16="http://schemas.microsoft.com/office/drawing/2014/main" id="{5CF69283-14E9-6B16-93A8-74C557603947}"/>
+                <a16:creationId xmlns:a16="http://schemas.microsoft.com/office/drawing/2014/main" id="{B49ADDCD-1F8A-F2C8-9044-E307C860413F}"/>
               </a:ext>
             </a:extLst>
           </p:cNvPr>
@@ -5284,7 +5278,7 @@
             <a:hlinkClick r:id="" action="ppaction://media"/>
             <a:extLst>
               <a:ext uri="{FF2B5EF4-FFF2-40B4-BE49-F238E27FC236}">
-                <a16:creationId xmlns:a16="http://schemas.microsoft.com/office/drawing/2014/main" id="{DA2DA22D-F5BB-C1A8-8F3B-AE980947B9DC}"/>
+                <a16:creationId xmlns:a16="http://schemas.microsoft.com/office/drawing/2014/main" id="{BB9F7801-BAFE-DF10-26BD-99046EC86E54}"/>
               </a:ext>
             </a:extLst>
           </p:cNvPr>
@@ -5319,7 +5313,7 @@
     </p:spTree>
     <p:extLst>
       <p:ext uri="{BB962C8B-B14F-4D97-AF65-F5344CB8AC3E}">
-        <p14:creationId xmlns:p14="http://schemas.microsoft.com/office/powerpoint/2010/main" val="3216174364"/>
+        <p14:creationId xmlns:p14="http://schemas.microsoft.com/office/powerpoint/2010/main" val="278774364"/>
       </p:ext>
     </p:extLst>
   </p:cSld>
@@ -5362,7 +5356,7 @@
                                   <p:childTnLst>
                                     <p:cmd type="call" cmd="playFrom(0.0)">
                                       <p:cBhvr>
-                                        <p:cTn id="6" dur="6451" fill="hold"/>
+                                        <p:cTn id="6" dur="6076" fill="hold"/>
                                         <p:tgtEl>
                                           <p:spTgt spid="6"/>
                                         </p:tgtEl>
@@ -5443,7 +5437,7 @@
           <p:cNvPr id="2" name="テキスト ボックス 1">
             <a:extLst>
               <a:ext uri="{FF2B5EF4-FFF2-40B4-BE49-F238E27FC236}">
-                <a16:creationId xmlns:a16="http://schemas.microsoft.com/office/drawing/2014/main" id="{D2D31414-8D30-13AD-17F5-F7CD565F90C5}"/>
+                <a16:creationId xmlns:a16="http://schemas.microsoft.com/office/drawing/2014/main" id="{3A727A2C-8C7E-D9EF-8D94-B815783442F2}"/>
               </a:ext>
             </a:extLst>
           </p:cNvPr>
@@ -5489,7 +5483,7 @@
           <p:cNvPr id="3" name="テキスト ボックス 2">
             <a:extLst>
               <a:ext uri="{FF2B5EF4-FFF2-40B4-BE49-F238E27FC236}">
-                <a16:creationId xmlns:a16="http://schemas.microsoft.com/office/drawing/2014/main" id="{0E6145A3-9EB7-01AB-B0BB-1B9CF9100537}"/>
+                <a16:creationId xmlns:a16="http://schemas.microsoft.com/office/drawing/2014/main" id="{D6D20D64-8FCA-BE2F-815A-17D0361D9384}"/>
               </a:ext>
             </a:extLst>
           </p:cNvPr>
@@ -5529,7 +5523,7 @@
           <p:cNvPr id="4" name="テキスト ボックス 3">
             <a:extLst>
               <a:ext uri="{FF2B5EF4-FFF2-40B4-BE49-F238E27FC236}">
-                <a16:creationId xmlns:a16="http://schemas.microsoft.com/office/drawing/2014/main" id="{DB570F84-7CD6-E9F8-79ED-723E77D32262}"/>
+                <a16:creationId xmlns:a16="http://schemas.microsoft.com/office/drawing/2014/main" id="{CE714784-5223-C483-D016-69A2194F9F7E}"/>
               </a:ext>
             </a:extLst>
           </p:cNvPr>
@@ -5594,7 +5588,7 @@
           <p:cNvPr id="5" name="テキスト ボックス 4">
             <a:extLst>
               <a:ext uri="{FF2B5EF4-FFF2-40B4-BE49-F238E27FC236}">
-                <a16:creationId xmlns:a16="http://schemas.microsoft.com/office/drawing/2014/main" id="{25A2B14C-3344-0B70-002D-74C27DEA5769}"/>
+                <a16:creationId xmlns:a16="http://schemas.microsoft.com/office/drawing/2014/main" id="{58AF7999-01E0-85EE-A700-1C7E17A75BD1}"/>
               </a:ext>
             </a:extLst>
           </p:cNvPr>
@@ -5641,7 +5635,7 @@
             <a:hlinkClick r:id="" action="ppaction://media"/>
             <a:extLst>
               <a:ext uri="{FF2B5EF4-FFF2-40B4-BE49-F238E27FC236}">
-                <a16:creationId xmlns:a16="http://schemas.microsoft.com/office/drawing/2014/main" id="{8E6B4081-5419-3119-9EF8-E37EB5B8D6DE}"/>
+                <a16:creationId xmlns:a16="http://schemas.microsoft.com/office/drawing/2014/main" id="{A64C1965-3813-9723-341D-A0BDF90FABBD}"/>
               </a:ext>
             </a:extLst>
           </p:cNvPr>
@@ -5676,7 +5670,7 @@
     </p:spTree>
     <p:extLst>
       <p:ext uri="{BB962C8B-B14F-4D97-AF65-F5344CB8AC3E}">
-        <p14:creationId xmlns:p14="http://schemas.microsoft.com/office/powerpoint/2010/main" val="250461129"/>
+        <p14:creationId xmlns:p14="http://schemas.microsoft.com/office/powerpoint/2010/main" val="131493075"/>
       </p:ext>
     </p:extLst>
   </p:cSld>
